--- a/lessons/btli101_xrw5fg/btli1_l2_slides.pptx
+++ b/lessons/btli101_xrw5fg/btli1_l2_slides.pptx
@@ -304,7 +304,51 @@
           <a:lstStyle/>
           <a:p>
             <a:r>
-              <a:t>BIBLE MEDITATION - Lesson 2. ~55 min core. Character anchor: Faithfulness - same as L1, but L1 taught talking TO God (prayer), L2 teaches LISTENING (the Word). Competence: S.O.A.P.S Journal. Memory verse: Awit 1:2. Pre-session: TV tested, Love Letter + 'Word of God Speak' videos pre-cued, S.O.A.P.S printouts (1/pax), pens, memory-verse cards, Filipos 4:6-7 copies, timer visible. Brief interns: celebrate prayer-pact misses gently; model filling S.O.A.P.S at tables (don't lecture); the Sharing letter is the EOLO bridge to evangelism.</a:t>
+              <a:rPr sz="2200" dirty="0"/>
+              <a:t>BIBLE MEDITATION - Lesson 2. ~55 min core. </a:t>
+            </a:r>
+            <a:endParaRPr lang="en-US" sz="2200" dirty="0"/>
+          </a:p>
+          <a:p>
+            <a:r>
+              <a:rPr sz="2200" dirty="0"/>
+              <a:t>Character anchor: Faithfulness - same as L1, but L1 taught talking TO God (prayer), L2 teaches LISTENING (the Word). </a:t>
+            </a:r>
+            <a:endParaRPr lang="en-US" sz="2200" dirty="0"/>
+          </a:p>
+          <a:p>
+            <a:r>
+              <a:rPr sz="2200" dirty="0"/>
+              <a:t>Competence: S.O.A.P.S Journal. </a:t>
+            </a:r>
+            <a:endParaRPr lang="en-US" sz="2200" dirty="0"/>
+          </a:p>
+          <a:p>
+            <a:r>
+              <a:rPr sz="2200" dirty="0"/>
+              <a:t>Memory verse: Awit 1:2. Pre-session: TV tested, Love Letter + 'Word of God Speak' videos pre-cued, </a:t>
+            </a:r>
+            <a:endParaRPr lang="en-US" sz="2200" dirty="0"/>
+          </a:p>
+          <a:p>
+            <a:r>
+              <a:rPr sz="2200" dirty="0"/>
+              <a:t>S.O.A.P.S printouts (1/pax), pens, memory-verse cards, </a:t>
+            </a:r>
+            <a:r>
+              <a:rPr sz="2200" dirty="0" err="1"/>
+              <a:t>Filipos</a:t>
+            </a:r>
+            <a:r>
+              <a:rPr sz="2200" dirty="0"/>
+              <a:t> 4:6-7 copies, timer visible. </a:t>
+            </a:r>
+            <a:endParaRPr lang="en-US" sz="2200" dirty="0"/>
+          </a:p>
+          <a:p>
+            <a:r>
+              <a:rPr sz="2200" dirty="0"/>
+              <a:t>Brief interns: celebrate prayer-pact misses gently; model filling S.O.A.P.S at tables (don't lecture); the Sharing letter is the EOLO bridge to evangelism.</a:t>
             </a:r>
           </a:p>
         </p:txBody>
@@ -858,7 +902,21 @@
           <a:lstStyle/>
           <a:p>
             <a:r>
-              <a:t>TALAKAY ~2 min (target 32:00). The Tozer quote - the sharp edge: 'Whatever keeps me from my Bible is my enemy, however harmless it may appear to me.' CAUTION story: The Prince of Grenada - 33 years in solitary with only a Bible; cell walls covered with Bible trivia but no evidence he met God. Information without transformation. 'Huwag lang sanang lumalim ang pagkaalam kundi ang pagkakilala sa Dios.'</a:t>
+              <a:rPr dirty="0"/>
+              <a:t>TALAKAY ~2 min (target 32:00). </a:t>
+            </a:r>
+            <a:endParaRPr lang="en-US" dirty="0"/>
+          </a:p>
+          <a:p>
+            <a:r>
+              <a:rPr lang="en-US" i="1" dirty="0"/>
+              <a:t>AW Tozer, a pastor, author and devotional writer is known for his book “The Pursuit of God” written to encourage believers to know God deeply.</a:t>
+            </a:r>
+          </a:p>
+          <a:p>
+            <a:r>
+              <a:rPr dirty="0"/>
+              <a:t>The Tozer quote - the sharp edge: 'Whatever keeps me from my Bible is my enemy, however harmless it may appear to me.'</a:t>
             </a:r>
           </a:p>
         </p:txBody>
@@ -1014,8 +1072,151 @@
           <a:lstStyle/>
           <a:p>
             <a:r>
-              <a:t>TALAKAY ~1 min (target 35:00). Devotion-opener prayer, 1 Samuel 3:10: 'Mangusap po kayo, nakikinig ang inyong lingkod.' Iisang linya. Before opening the Bible tomorrow - before caffeine - pray this. It asks the Spirit to open your mind before you open the book (Samuel posture).</a:t>
-            </a:r>
+              <a:rPr dirty="0"/>
+              <a:t>TALAKAY ~1 min (target 35:00). Devotion-opener prayer, 1 Samuel 3:10: '</a:t>
+            </a:r>
+            <a:r>
+              <a:rPr dirty="0" err="1"/>
+              <a:t>Mangusap</a:t>
+            </a:r>
+            <a:r>
+              <a:rPr dirty="0"/>
+              <a:t> po kayo, </a:t>
+            </a:r>
+            <a:r>
+              <a:rPr dirty="0" err="1"/>
+              <a:t>nakikinig</a:t>
+            </a:r>
+            <a:r>
+              <a:rPr dirty="0"/>
+              <a:t> ang </a:t>
+            </a:r>
+            <a:r>
+              <a:rPr dirty="0" err="1"/>
+              <a:t>inyong</a:t>
+            </a:r>
+            <a:r>
+              <a:rPr dirty="0"/>
+              <a:t> </a:t>
+            </a:r>
+            <a:r>
+              <a:rPr dirty="0" err="1"/>
+              <a:t>lingkod</a:t>
+            </a:r>
+            <a:r>
+              <a:rPr dirty="0"/>
+              <a:t>.' </a:t>
+            </a:r>
+            <a:r>
+              <a:rPr dirty="0" err="1"/>
+              <a:t>Iisang</a:t>
+            </a:r>
+            <a:r>
+              <a:rPr dirty="0"/>
+              <a:t> </a:t>
+            </a:r>
+            <a:r>
+              <a:rPr dirty="0" err="1"/>
+              <a:t>linya</a:t>
+            </a:r>
+            <a:r>
+              <a:rPr dirty="0"/>
+              <a:t>. Before opening the Bible tomorrow - before caffeine - pray this. It asks the Spirit to open your mind before you open the book (Samuel posture).</a:t>
+            </a:r>
+            <a:endParaRPr lang="en-US" dirty="0"/>
+          </a:p>
+          <a:p>
+            <a:r>
+              <a:rPr lang="en-US" dirty="0"/>
+              <a:t>CAUTION story: </a:t>
+            </a:r>
+          </a:p>
+          <a:p>
+            <a:r>
+              <a:rPr lang="en-US" dirty="0"/>
+              <a:t>⚠️ The Prince of Grenada </a:t>
+            </a:r>
+          </a:p>
+          <a:p>
+            <a:r>
+              <a:rPr lang="en-US" dirty="0"/>
+              <a:t>Tell this near the end of TALAKAY: A prisoner in Grenada was kept in solitary for 33 years with nothing but a Bible. When he died, his cell walls were covered with Bible trivia — chapter counts, longest word, number of times a name appears. But no evidence he ever met God. Information without transformation. "</a:t>
+            </a:r>
+            <a:r>
+              <a:rPr lang="en-US" dirty="0" err="1"/>
+              <a:t>Huwag</a:t>
+            </a:r>
+            <a:r>
+              <a:rPr lang="en-US" dirty="0"/>
+              <a:t> lang </a:t>
+            </a:r>
+            <a:r>
+              <a:rPr lang="en-US" dirty="0" err="1"/>
+              <a:t>sanang</a:t>
+            </a:r>
+            <a:r>
+              <a:rPr lang="en-US" dirty="0"/>
+              <a:t> </a:t>
+            </a:r>
+            <a:r>
+              <a:rPr lang="en-US" dirty="0" err="1"/>
+              <a:t>lumalim</a:t>
+            </a:r>
+            <a:r>
+              <a:rPr lang="en-US" dirty="0"/>
+              <a:t> ang </a:t>
+            </a:r>
+            <a:r>
+              <a:rPr lang="en-US" dirty="0" err="1"/>
+              <a:t>pagkaalam</a:t>
+            </a:r>
+            <a:r>
+              <a:rPr lang="en-US" dirty="0"/>
+              <a:t> natin </a:t>
+            </a:r>
+            <a:r>
+              <a:rPr lang="en-US" dirty="0" err="1"/>
+              <a:t>sa</a:t>
+            </a:r>
+            <a:r>
+              <a:rPr lang="en-US" dirty="0"/>
+              <a:t> Salita ng Dios </a:t>
+            </a:r>
+            <a:r>
+              <a:rPr lang="en-US" dirty="0" err="1"/>
+              <a:t>kundi</a:t>
+            </a:r>
+            <a:r>
+              <a:rPr lang="en-US" dirty="0"/>
+              <a:t> </a:t>
+            </a:r>
+            <a:r>
+              <a:rPr lang="en-US" dirty="0" err="1"/>
+              <a:t>lumalim</a:t>
+            </a:r>
+            <a:r>
+              <a:rPr lang="en-US" dirty="0"/>
+              <a:t> ang </a:t>
+            </a:r>
+            <a:r>
+              <a:rPr lang="en-US" dirty="0" err="1"/>
+              <a:t>pagkakilala</a:t>
+            </a:r>
+            <a:r>
+              <a:rPr lang="en-US" dirty="0"/>
+              <a:t> natin </a:t>
+            </a:r>
+            <a:r>
+              <a:rPr lang="en-US" dirty="0" err="1"/>
+              <a:t>sa</a:t>
+            </a:r>
+            <a:r>
+              <a:rPr lang="en-US" dirty="0"/>
+              <a:t> Dios."</a:t>
+            </a:r>
+          </a:p>
+          <a:p>
+            <a:endParaRPr dirty="0"/>
           </a:p>
         </p:txBody>
       </p:sp>
@@ -1275,7 +1476,136 @@
           <a:lstStyle/>
           <a:p>
             <a:r>
-              <a:t>PUKAW ~2 min (target 2:00). STAND UP, no slides yet, look at faces. ASK: 'Kumusta ang prayer pact natin from last week? Sino ang nag-ACTS prayer kahit isang beses ngayong linggo? Itaas ang kamay.' Take 2-3 VOLUNTARY shares - never shame the misses (celebration culture). PASTORAL: L1's anchor was Faithfulness (daily prayer); L2's is also Faithfulness (daily Word). The callback bridges: both halves of the conversation count - we celebrated talking, now we add listening.</a:t>
+              <a:rPr dirty="0"/>
+              <a:t>PUKAW ~2 min (target 2:00). </a:t>
+            </a:r>
+            <a:endParaRPr lang="en-US" dirty="0"/>
+          </a:p>
+          <a:p>
+            <a:r>
+              <a:rPr dirty="0"/>
+              <a:t>STAND UP, no slides yet, look at faces. </a:t>
+            </a:r>
+            <a:endParaRPr lang="en-US" dirty="0"/>
+          </a:p>
+          <a:p>
+            <a:r>
+              <a:rPr dirty="0"/>
+              <a:t>ASK: </a:t>
+            </a:r>
+            <a:endParaRPr lang="en-US" dirty="0"/>
+          </a:p>
+          <a:p>
+            <a:pPr marL="171450" indent="-171450">
+              <a:buFont typeface="Arial" panose="020B0604020202020204" pitchFamily="34" charset="0"/>
+              <a:buChar char="•"/>
+            </a:pPr>
+            <a:r>
+              <a:rPr dirty="0"/>
+              <a:t>'</a:t>
+            </a:r>
+            <a:r>
+              <a:rPr dirty="0" err="1"/>
+              <a:t>Kumusta</a:t>
+            </a:r>
+            <a:r>
+              <a:rPr dirty="0"/>
+              <a:t> ang prayer pact natin from last week? </a:t>
+            </a:r>
+            <a:endParaRPr lang="en-US" dirty="0"/>
+          </a:p>
+          <a:p>
+            <a:pPr marL="171450" indent="-171450">
+              <a:buFont typeface="Arial" panose="020B0604020202020204" pitchFamily="34" charset="0"/>
+              <a:buChar char="•"/>
+            </a:pPr>
+            <a:r>
+              <a:rPr dirty="0"/>
+              <a:t>Sino ang nag-ACTS prayer </a:t>
+            </a:r>
+            <a:r>
+              <a:rPr dirty="0" err="1"/>
+              <a:t>kahit</a:t>
+            </a:r>
+            <a:r>
+              <a:rPr dirty="0"/>
+              <a:t> </a:t>
+            </a:r>
+            <a:r>
+              <a:rPr dirty="0" err="1"/>
+              <a:t>isang</a:t>
+            </a:r>
+            <a:r>
+              <a:rPr dirty="0"/>
+              <a:t> </a:t>
+            </a:r>
+            <a:r>
+              <a:rPr dirty="0" err="1"/>
+              <a:t>beses</a:t>
+            </a:r>
+            <a:r>
+              <a:rPr dirty="0"/>
+              <a:t> </a:t>
+            </a:r>
+            <a:r>
+              <a:rPr dirty="0" err="1"/>
+              <a:t>ngayong</a:t>
+            </a:r>
+            <a:r>
+              <a:rPr dirty="0"/>
+              <a:t> </a:t>
+            </a:r>
+            <a:r>
+              <a:rPr dirty="0" err="1"/>
+              <a:t>linggo</a:t>
+            </a:r>
+            <a:r>
+              <a:rPr dirty="0"/>
+              <a:t>? </a:t>
+            </a:r>
+            <a:endParaRPr lang="en-US" dirty="0"/>
+          </a:p>
+          <a:p>
+            <a:pPr marL="171450" indent="-171450">
+              <a:buFont typeface="Arial" panose="020B0604020202020204" pitchFamily="34" charset="0"/>
+              <a:buChar char="•"/>
+            </a:pPr>
+            <a:r>
+              <a:rPr dirty="0" err="1"/>
+              <a:t>Itaas</a:t>
+            </a:r>
+            <a:r>
+              <a:rPr dirty="0"/>
+              <a:t> ang </a:t>
+            </a:r>
+            <a:r>
+              <a:rPr dirty="0" err="1"/>
+              <a:t>kamay</a:t>
+            </a:r>
+            <a:r>
+              <a:rPr dirty="0"/>
+              <a:t>.' </a:t>
+            </a:r>
+            <a:endParaRPr lang="en-US" dirty="0"/>
+          </a:p>
+          <a:p>
+            <a:r>
+              <a:rPr dirty="0"/>
+              <a:t>Take 2-3 VOLUNTARY shares - never shame the misses (celebration culture). </a:t>
+            </a:r>
+            <a:endParaRPr lang="en-US" dirty="0"/>
+          </a:p>
+          <a:p>
+            <a:r>
+              <a:rPr dirty="0"/>
+              <a:t>PASTORAL: L1's anchor was Faithfulness (daily prayer); L2's is also Faithfulness (daily Word). </a:t>
+            </a:r>
+            <a:endParaRPr lang="en-US" dirty="0"/>
+          </a:p>
+          <a:p>
+            <a:r>
+              <a:rPr dirty="0"/>
+              <a:t>The callback bridges: both halves of the conversation count - we celebrated talking, now we add listening.</a:t>
             </a:r>
           </a:p>
         </p:txBody>
@@ -1361,8 +1691,352 @@
           <a:lstStyle/>
           <a:p>
             <a:r>
-              <a:t>GAWIN ~8 min (target 47:00). HANDS-ON: Read Filipos 4:6-7 (pairs with L1/prayer - anxiety dissolved by prayer). Walk ONE box at a time, ~90 sec each; don't move on until interns confirm tables are tracking. If stuck: 'Anuman ang nakatakas sa atensyon mo sa unang basa.' Application: 'ngayong linggo' not 'in the future'; 'sa asawa ko' not 'sa ibang tao.' Sharing: 'Tingnan mo ang EOLO list mo.'</a:t>
-            </a:r>
+              <a:rPr dirty="0"/>
+              <a:t>GAWIN ~8 min (target 47:00). HANDS-ON: Read </a:t>
+            </a:r>
+            <a:r>
+              <a:rPr dirty="0" err="1"/>
+              <a:t>Filipos</a:t>
+            </a:r>
+            <a:r>
+              <a:rPr dirty="0"/>
+              <a:t> 4:6-7 (pairs with L1/prayer - anxiety dissolved by prayer). Walk ONE box at a time, ~90 sec each; don't move on until interns confirm tables are tracking. </a:t>
+            </a:r>
+            <a:endParaRPr lang="en-US" dirty="0"/>
+          </a:p>
+          <a:p>
+            <a:r>
+              <a:rPr dirty="0"/>
+              <a:t>If stuck: 'Anuman ang </a:t>
+            </a:r>
+            <a:r>
+              <a:rPr dirty="0" err="1"/>
+              <a:t>nakatakas</a:t>
+            </a:r>
+            <a:r>
+              <a:rPr dirty="0"/>
+              <a:t> </a:t>
+            </a:r>
+            <a:r>
+              <a:rPr dirty="0" err="1"/>
+              <a:t>sa</a:t>
+            </a:r>
+            <a:r>
+              <a:rPr dirty="0"/>
+              <a:t> </a:t>
+            </a:r>
+            <a:r>
+              <a:rPr dirty="0" err="1"/>
+              <a:t>atensyon</a:t>
+            </a:r>
+            <a:r>
+              <a:rPr dirty="0"/>
+              <a:t> </a:t>
+            </a:r>
+            <a:r>
+              <a:rPr dirty="0" err="1"/>
+              <a:t>mo</a:t>
+            </a:r>
+            <a:r>
+              <a:rPr dirty="0"/>
+              <a:t> </a:t>
+            </a:r>
+            <a:r>
+              <a:rPr dirty="0" err="1"/>
+              <a:t>sa</a:t>
+            </a:r>
+            <a:r>
+              <a:rPr dirty="0"/>
+              <a:t> </a:t>
+            </a:r>
+            <a:r>
+              <a:rPr dirty="0" err="1"/>
+              <a:t>unang</a:t>
+            </a:r>
+            <a:r>
+              <a:rPr dirty="0"/>
+              <a:t> </a:t>
+            </a:r>
+            <a:r>
+              <a:rPr dirty="0" err="1"/>
+              <a:t>basa</a:t>
+            </a:r>
+            <a:r>
+              <a:rPr dirty="0"/>
+              <a:t>.' Application: '</a:t>
+            </a:r>
+            <a:r>
+              <a:rPr dirty="0" err="1"/>
+              <a:t>ngayong</a:t>
+            </a:r>
+            <a:r>
+              <a:rPr dirty="0"/>
+              <a:t> </a:t>
+            </a:r>
+            <a:r>
+              <a:rPr dirty="0" err="1"/>
+              <a:t>linggo</a:t>
+            </a:r>
+            <a:r>
+              <a:rPr dirty="0"/>
+              <a:t>' not 'in the future'; '</a:t>
+            </a:r>
+            <a:r>
+              <a:rPr dirty="0" err="1"/>
+              <a:t>sa</a:t>
+            </a:r>
+            <a:r>
+              <a:rPr dirty="0"/>
+              <a:t> </a:t>
+            </a:r>
+            <a:r>
+              <a:rPr dirty="0" err="1"/>
+              <a:t>asawa</a:t>
+            </a:r>
+            <a:r>
+              <a:rPr dirty="0"/>
+              <a:t> ko' not '</a:t>
+            </a:r>
+            <a:r>
+              <a:rPr dirty="0" err="1"/>
+              <a:t>sa</a:t>
+            </a:r>
+            <a:r>
+              <a:rPr dirty="0"/>
+              <a:t> </a:t>
+            </a:r>
+            <a:r>
+              <a:rPr dirty="0" err="1"/>
+              <a:t>ibang</a:t>
+            </a:r>
+            <a:r>
+              <a:rPr dirty="0"/>
+              <a:t> </a:t>
+            </a:r>
+            <a:r>
+              <a:rPr dirty="0" err="1"/>
+              <a:t>tao</a:t>
+            </a:r>
+            <a:r>
+              <a:rPr dirty="0"/>
+              <a:t>.' Sharing: '</a:t>
+            </a:r>
+            <a:r>
+              <a:rPr dirty="0" err="1"/>
+              <a:t>Tingnan</a:t>
+            </a:r>
+            <a:r>
+              <a:rPr dirty="0"/>
+              <a:t> </a:t>
+            </a:r>
+            <a:r>
+              <a:rPr dirty="0" err="1"/>
+              <a:t>mo</a:t>
+            </a:r>
+            <a:r>
+              <a:rPr dirty="0"/>
+              <a:t> ang EOLO list mo.'</a:t>
+            </a:r>
+            <a:endParaRPr lang="en-US" dirty="0"/>
+          </a:p>
+          <a:p>
+            <a:r>
+              <a:rPr lang="en-PH" dirty="0"/>
+              <a:t>S — Scripture · </a:t>
+            </a:r>
+            <a:r>
+              <a:rPr lang="en-PH" dirty="0" err="1"/>
+              <a:t>Isulat</a:t>
+            </a:r>
+            <a:r>
+              <a:rPr lang="en-PH" dirty="0"/>
+              <a:t> ang isa o </a:t>
+            </a:r>
+            <a:r>
+              <a:rPr lang="en-PH" dirty="0" err="1"/>
+              <a:t>dalawang</a:t>
+            </a:r>
+            <a:r>
+              <a:rPr lang="en-PH" dirty="0"/>
+              <a:t> verses </a:t>
+            </a:r>
+            <a:r>
+              <a:rPr lang="en-PH" dirty="0" err="1"/>
+              <a:t>na</a:t>
+            </a:r>
+            <a:r>
+              <a:rPr lang="en-PH" dirty="0"/>
+              <a:t> </a:t>
+            </a:r>
+            <a:r>
+              <a:rPr lang="en-PH" dirty="0" err="1"/>
+              <a:t>pumukaw</a:t>
+            </a:r>
+            <a:r>
+              <a:rPr lang="en-PH" dirty="0"/>
+              <a:t> </a:t>
+            </a:r>
+            <a:r>
+              <a:rPr lang="en-PH" dirty="0" err="1"/>
+              <a:t>sa</a:t>
+            </a:r>
+            <a:r>
+              <a:rPr lang="en-PH" dirty="0"/>
+              <a:t> puso.</a:t>
+            </a:r>
+          </a:p>
+          <a:p>
+            <a:r>
+              <a:rPr lang="en-PH" dirty="0"/>
+              <a:t>O — Observation · Sino </a:t>
+            </a:r>
+            <a:r>
+              <a:rPr lang="en-PH" dirty="0" err="1"/>
+              <a:t>nagsasalita</a:t>
+            </a:r>
+            <a:r>
+              <a:rPr lang="en-PH" dirty="0"/>
+              <a:t>? Saan? Bakit? Ano ang context?</a:t>
+            </a:r>
+          </a:p>
+          <a:p>
+            <a:r>
+              <a:rPr lang="en-PH" dirty="0"/>
+              <a:t>A — Application · Paano </a:t>
+            </a:r>
+            <a:r>
+              <a:rPr lang="en-PH" dirty="0" err="1"/>
+              <a:t>mo</a:t>
+            </a:r>
+            <a:r>
+              <a:rPr lang="en-PH" dirty="0"/>
+              <a:t> </a:t>
+            </a:r>
+            <a:r>
+              <a:rPr lang="en-PH" dirty="0" err="1"/>
+              <a:t>ito</a:t>
+            </a:r>
+            <a:r>
+              <a:rPr lang="en-PH" dirty="0"/>
+              <a:t> </a:t>
+            </a:r>
+            <a:r>
+              <a:rPr lang="en-PH" dirty="0" err="1"/>
+              <a:t>i-aapply</a:t>
+            </a:r>
+            <a:r>
+              <a:rPr lang="en-PH" dirty="0"/>
+              <a:t> </a:t>
+            </a:r>
+            <a:r>
+              <a:rPr lang="en-PH" dirty="0" err="1"/>
+              <a:t>ngayong</a:t>
+            </a:r>
+            <a:r>
+              <a:rPr lang="en-PH" dirty="0"/>
+              <a:t> </a:t>
+            </a:r>
+            <a:r>
+              <a:rPr lang="en-PH" dirty="0" err="1"/>
+              <a:t>linggo</a:t>
+            </a:r>
+            <a:r>
+              <a:rPr lang="en-PH" dirty="0"/>
+              <a:t>? Specific.</a:t>
+            </a:r>
+          </a:p>
+          <a:p>
+            <a:r>
+              <a:rPr lang="en-PH" dirty="0"/>
+              <a:t>P — Prayer · </a:t>
+            </a:r>
+            <a:r>
+              <a:rPr lang="en-PH" dirty="0" err="1"/>
+              <a:t>Maikling</a:t>
+            </a:r>
+            <a:r>
+              <a:rPr lang="en-PH" dirty="0"/>
+              <a:t> </a:t>
+            </a:r>
+            <a:r>
+              <a:rPr lang="en-PH" dirty="0" err="1"/>
+              <a:t>panalangin</a:t>
+            </a:r>
+            <a:r>
+              <a:rPr lang="en-PH" dirty="0"/>
+              <a:t> </a:t>
+            </a:r>
+            <a:r>
+              <a:rPr lang="en-PH" dirty="0" err="1"/>
+              <a:t>bilang</a:t>
+            </a:r>
+            <a:r>
+              <a:rPr lang="en-PH" dirty="0"/>
+              <a:t> </a:t>
+            </a:r>
+            <a:r>
+              <a:rPr lang="en-PH" dirty="0" err="1"/>
+              <a:t>tugon</a:t>
+            </a:r>
+            <a:r>
+              <a:rPr lang="en-PH" dirty="0"/>
+              <a:t>.</a:t>
+            </a:r>
+          </a:p>
+          <a:p>
+            <a:r>
+              <a:rPr lang="en-PH" dirty="0"/>
+              <a:t>S — Sharing · </a:t>
+            </a:r>
+            <a:r>
+              <a:rPr lang="en-PH" dirty="0" err="1"/>
+              <a:t>Kanino</a:t>
+            </a:r>
+            <a:r>
+              <a:rPr lang="en-PH" dirty="0"/>
+              <a:t> </a:t>
+            </a:r>
+            <a:r>
+              <a:rPr lang="en-PH" dirty="0" err="1"/>
+              <a:t>mo</a:t>
+            </a:r>
+            <a:r>
+              <a:rPr lang="en-PH" dirty="0"/>
+              <a:t> </a:t>
+            </a:r>
+            <a:r>
+              <a:rPr lang="en-PH" dirty="0" err="1"/>
+              <a:t>ito</a:t>
+            </a:r>
+            <a:r>
+              <a:rPr lang="en-PH" dirty="0"/>
+              <a:t> </a:t>
+            </a:r>
+            <a:r>
+              <a:rPr lang="en-PH" dirty="0" err="1"/>
+              <a:t>puwedeng</a:t>
+            </a:r>
+            <a:r>
+              <a:rPr lang="en-PH" dirty="0"/>
+              <a:t> </a:t>
+            </a:r>
+            <a:r>
+              <a:rPr lang="en-PH" dirty="0" err="1"/>
+              <a:t>i</a:t>
+            </a:r>
+            <a:r>
+              <a:rPr lang="en-PH" dirty="0"/>
+              <a:t>-share? Hint: isa </a:t>
+            </a:r>
+            <a:r>
+              <a:rPr lang="en-PH" dirty="0" err="1"/>
+              <a:t>sa</a:t>
+            </a:r>
+            <a:r>
+              <a:rPr lang="en-PH" dirty="0"/>
+              <a:t> EOLO names mo.</a:t>
+            </a:r>
+            <a:endParaRPr dirty="0"/>
           </a:p>
         </p:txBody>
       </p:sp>
@@ -1447,7 +2121,112 @@
           <a:lstStyle/>
           <a:p>
             <a:r>
-              <a:t>DALHIN ~4 min (target 51:00). 30-Day S.O.A.P.S Challenge: one Bible book, one chapter a day, 30 days. Recommend John (21 chapters). Alternatives: Filipos, Galacia, 1 John. Read then S.O.A.P.S then repeat. Tracker: the 30-day grid in the Participant Guide (or a notebook - consistency over format). EOLO BRIDGE (read aloud, slowly): 'Bawat araw ng S.O.A.P.S, ang Sharing line mo ay isang EOLO name. Para mag-share ka, kailangan may natutunan ka. Para may natutunan ka, kailangan magbasa ka. Hindi separate ang Bible reading at evangelism - magkadikit sila.'</a:t>
+              <a:rPr dirty="0"/>
+              <a:t>DALHIN ~4 min (target 51:00). 30-Day S.O.A.P.S Challenge: one Bible book, one chapter a day, 30 days. Recommend John (21 chapters). Alternatives: </a:t>
+            </a:r>
+            <a:r>
+              <a:rPr dirty="0" err="1"/>
+              <a:t>Filipos</a:t>
+            </a:r>
+            <a:r>
+              <a:rPr dirty="0"/>
+              <a:t>, </a:t>
+            </a:r>
+            <a:r>
+              <a:rPr dirty="0" err="1"/>
+              <a:t>Galacia</a:t>
+            </a:r>
+            <a:r>
+              <a:rPr dirty="0"/>
+              <a:t>, 1 John. Read then S.O.A.P.S then repeat. Tracker: the 30-day grid in the Participant Guide (or a notebook - consistency over format). EOLO BRIDGE (read aloud, slowly): '</a:t>
+            </a:r>
+            <a:r>
+              <a:rPr dirty="0" err="1"/>
+              <a:t>Bawat</a:t>
+            </a:r>
+            <a:r>
+              <a:rPr dirty="0"/>
+              <a:t> </a:t>
+            </a:r>
+            <a:r>
+              <a:rPr dirty="0" err="1"/>
+              <a:t>araw</a:t>
+            </a:r>
+            <a:r>
+              <a:rPr dirty="0"/>
+              <a:t> ng S.O.A.P.S, ang Sharing line </a:t>
+            </a:r>
+            <a:r>
+              <a:rPr dirty="0" err="1"/>
+              <a:t>mo</a:t>
+            </a:r>
+            <a:r>
+              <a:rPr dirty="0"/>
+              <a:t> ay </a:t>
+            </a:r>
+            <a:r>
+              <a:rPr dirty="0" err="1"/>
+              <a:t>isang</a:t>
+            </a:r>
+            <a:r>
+              <a:rPr dirty="0"/>
+              <a:t> EOLO name. Para mag-share ka, </a:t>
+            </a:r>
+            <a:r>
+              <a:rPr dirty="0" err="1"/>
+              <a:t>kailangan</a:t>
+            </a:r>
+            <a:r>
+              <a:rPr dirty="0"/>
+              <a:t> may </a:t>
+            </a:r>
+            <a:r>
+              <a:rPr dirty="0" err="1"/>
+              <a:t>natutunan</a:t>
+            </a:r>
+            <a:r>
+              <a:rPr dirty="0"/>
+              <a:t> ka. Para may </a:t>
+            </a:r>
+            <a:r>
+              <a:rPr dirty="0" err="1"/>
+              <a:t>natutunan</a:t>
+            </a:r>
+            <a:r>
+              <a:rPr dirty="0"/>
+              <a:t> ka, </a:t>
+            </a:r>
+            <a:r>
+              <a:rPr dirty="0" err="1"/>
+              <a:t>kailangan</a:t>
+            </a:r>
+            <a:r>
+              <a:rPr dirty="0"/>
+              <a:t> </a:t>
+            </a:r>
+            <a:r>
+              <a:rPr dirty="0" err="1"/>
+              <a:t>magbasa</a:t>
+            </a:r>
+            <a:r>
+              <a:rPr dirty="0"/>
+              <a:t> ka. Hindi separate ang Bible reading at evangelism - </a:t>
+            </a:r>
+            <a:r>
+              <a:rPr dirty="0" err="1"/>
+              <a:t>magkadikit</a:t>
+            </a:r>
+            <a:r>
+              <a:rPr dirty="0"/>
+              <a:t> </a:t>
+            </a:r>
+            <a:r>
+              <a:rPr dirty="0" err="1"/>
+              <a:t>sila</a:t>
+            </a:r>
+            <a:r>
+              <a:rPr dirty="0"/>
+              <a:t>.'</a:t>
             </a:r>
           </a:p>
         </p:txBody>
@@ -1620,7 +2399,14 @@
           <a:p>
             <a:r>
               <a:rPr dirty="0"/>
-              <a:t>DALHIN ~2 min (target 55:00). Close with 'Word of God Speak' by MercyMe (YouTube BYu8ZyETnKo) - embodies the Samuel posture. LET THE SONG FINISH; end with the room standing. Closing prayer (short): '</a:t>
+              <a:t>DALHIN ~2 min (target 55:00). Close with 'Word of God Speak' by MercyMe (YouTube BYu8ZyETnKo) - embodies the Samuel posture. </a:t>
+            </a:r>
+            <a:endParaRPr lang="en-US" dirty="0"/>
+          </a:p>
+          <a:p>
+            <a:r>
+              <a:rPr dirty="0"/>
+              <a:t>LET THE SONG FINISH; end with the room standing. Closing prayer (short): '</a:t>
             </a:r>
             <a:r>
               <a:rPr dirty="0" err="1"/>
@@ -1684,7 +2470,14 @@
             </a:r>
             <a:r>
               <a:rPr dirty="0"/>
-              <a:t>. Amen.' LAST 30 SEC: 'Sa </a:t>
+              <a:t>. Amen.' </a:t>
+            </a:r>
+            <a:endParaRPr lang="en-US" dirty="0"/>
+          </a:p>
+          <a:p>
+            <a:r>
+              <a:rPr dirty="0"/>
+              <a:t>LAST 30 SEC: 'Sa </a:t>
             </a:r>
             <a:r>
               <a:rPr dirty="0" err="1"/>
@@ -1700,7 +2493,14 @@
             </a:r>
             <a:r>
               <a:rPr dirty="0"/>
-              <a:t> kayo ng filled-in S.O.A.P.S notebook. L3 ay </a:t>
+              <a:t> kayo ng filled-in S.O.A.P.S notebook. </a:t>
+            </a:r>
+            <a:endParaRPr lang="en-US" dirty="0"/>
+          </a:p>
+          <a:p>
+            <a:r>
+              <a:rPr dirty="0"/>
+              <a:t>L3 ay </a:t>
             </a:r>
             <a:r>
               <a:rPr dirty="0" err="1"/>
@@ -1796,8 +2596,29 @@
             </a:r>
             <a:r>
               <a:rPr dirty="0"/>
-              <a:t>?'</a:t>
-            </a:r>
+              <a:t>?’</a:t>
+            </a:r>
+            <a:endParaRPr lang="en-US" dirty="0"/>
+          </a:p>
+          <a:p>
+            <a:endParaRPr lang="en-US" dirty="0"/>
+          </a:p>
+          <a:p>
+            <a:r>
+              <a:rPr lang="en-US" dirty="0"/>
+              <a:t>IF THERE IS STILL TIME:</a:t>
+            </a:r>
+          </a:p>
+          <a:p>
+            <a:r>
+              <a:rPr lang="en-US" dirty="0"/>
+              <a:t>Ask if there are those who struggle with quiz and let them stay for a bit so that they could </a:t>
+            </a:r>
+            <a:r>
+              <a:rPr lang="en-US"/>
+              <a:t>be assisted.</a:t>
+            </a:r>
+            <a:endParaRPr lang="en-US" dirty="0"/>
           </a:p>
         </p:txBody>
       </p:sp>
@@ -1882,7 +2703,39 @@
           <a:lstStyle/>
           <a:p>
             <a:r>
-              <a:t>PUKAW ~1 min (target 3:00). Play the 'Love Letter' video (YouTube ID: PHIY54Mvdxw, ~2 min). If no internet, narrate the Forrest Lunsway story orally. Emotional on-ramp to 'grabeng pagmamahal.'</a:t>
+              <a:rPr dirty="0"/>
+              <a:t>PUKAW ~1 min (target 3:00). Play the 'Love Letter' video. </a:t>
+            </a:r>
+            <a:endParaRPr lang="en-US" dirty="0"/>
+          </a:p>
+          <a:p>
+            <a:r>
+              <a:rPr dirty="0"/>
+              <a:t>If no internet, narrate the Forrest </a:t>
+            </a:r>
+            <a:r>
+              <a:rPr dirty="0" err="1"/>
+              <a:t>Lunsway</a:t>
+            </a:r>
+            <a:r>
+              <a:rPr dirty="0"/>
+              <a:t> story orally. Emotional on-ramp to '</a:t>
+            </a:r>
+            <a:r>
+              <a:rPr dirty="0" err="1"/>
+              <a:t>grabeng</a:t>
+            </a:r>
+            <a:r>
+              <a:rPr dirty="0"/>
+              <a:t> </a:t>
+            </a:r>
+            <a:r>
+              <a:rPr dirty="0" err="1"/>
+              <a:t>pagmamahal</a:t>
+            </a:r>
+            <a:r>
+              <a:rPr dirty="0"/>
+              <a:t>.'</a:t>
             </a:r>
           </a:p>
         </p:txBody>
@@ -1968,7 +2821,67 @@
           <a:lstStyle/>
           <a:p>
             <a:r>
-              <a:t>PUKAW ~2 min (target 5:00). Forrest &amp; Rose: 1983 - 72-y/o Forrest meets 62-y/o Rose, na-basted. 20 years of pursuit, 40-mile drives. 2003 - Rose jokes she'll marry him at 100; he takes it seriously and marries her on her 100th birthday - 'The Oldest Newlyweds.' 30 years of pagsusuyuan. Tee up the pivot (2 slides ahead): if Forrest's 30-year love is grabe, God's is 1,500 years.</a:t>
+              <a:rPr dirty="0"/>
+              <a:t>PUKAW ~2 min (target 5:00). </a:t>
+            </a:r>
+            <a:endParaRPr lang="en-US" dirty="0"/>
+          </a:p>
+          <a:p>
+            <a:r>
+              <a:rPr dirty="0"/>
+              <a:t>Forrest &amp; Rose: </a:t>
+            </a:r>
+            <a:endParaRPr lang="en-US" dirty="0"/>
+          </a:p>
+          <a:p>
+            <a:r>
+              <a:rPr dirty="0"/>
+              <a:t>1983 - 72-y/o Forrest meets 62-y/o Rose, </a:t>
+            </a:r>
+            <a:r>
+              <a:rPr dirty="0" err="1"/>
+              <a:t>na</a:t>
+            </a:r>
+            <a:r>
+              <a:rPr dirty="0"/>
+              <a:t>-basted. </a:t>
+            </a:r>
+            <a:endParaRPr lang="en-US" dirty="0"/>
+          </a:p>
+          <a:p>
+            <a:r>
+              <a:rPr dirty="0"/>
+              <a:t>20 years of pursuit, 40-mile drives. </a:t>
+            </a:r>
+            <a:endParaRPr lang="en-US" dirty="0"/>
+          </a:p>
+          <a:p>
+            <a:r>
+              <a:rPr dirty="0"/>
+              <a:t>2003 - Rose jokes she'll marry him at 100; he takes it seriously and marries her on her 100th birthday - 'The Oldest Newlyweds.' 30 years of </a:t>
+            </a:r>
+            <a:r>
+              <a:rPr dirty="0" err="1"/>
+              <a:t>pagsusuyuan</a:t>
+            </a:r>
+            <a:r>
+              <a:rPr dirty="0"/>
+              <a:t>. </a:t>
+            </a:r>
+            <a:endParaRPr lang="en-US" dirty="0"/>
+          </a:p>
+          <a:p>
+            <a:r>
+              <a:rPr dirty="0"/>
+              <a:t>Tee up the pivot (2 slides ahead): if Forrest's 30-year love is </a:t>
+            </a:r>
+            <a:r>
+              <a:rPr dirty="0" err="1"/>
+              <a:t>grabe</a:t>
+            </a:r>
+            <a:r>
+              <a:rPr dirty="0"/>
+              <a:t>, God's is 1,500 years.</a:t>
             </a:r>
           </a:p>
         </p:txBody>
@@ -2054,7 +2967,78 @@
           <a:lstStyle/>
           <a:p>
             <a:r>
-              <a:t>PUKAW ~2 min (target 7:00). PARTICIPANT GUIDE QUESTION - to tables (90 sec each, in pairs): 'Ano ang pinakanakakakilig na gesture of love na narinig, nabalitaan, o naranasan mo?' Ask, then sit with the silence. This surfaces their felt experience of love, which you redirect to God's greater love next.</a:t>
+              <a:rPr dirty="0"/>
+              <a:t>PUKAW ~2 min (target 7:00). </a:t>
+            </a:r>
+            <a:endParaRPr lang="en-US" dirty="0"/>
+          </a:p>
+          <a:p>
+            <a:r>
+              <a:rPr dirty="0"/>
+              <a:t>PARTICIPANT GUIDE QUESTION - to tables (90 sec each, in pairs): 'Ano ang </a:t>
+            </a:r>
+            <a:r>
+              <a:rPr dirty="0" err="1"/>
+              <a:t>pinakanakakakilig</a:t>
+            </a:r>
+            <a:r>
+              <a:rPr dirty="0"/>
+              <a:t> </a:t>
+            </a:r>
+            <a:r>
+              <a:rPr dirty="0" err="1"/>
+              <a:t>na</a:t>
+            </a:r>
+            <a:r>
+              <a:rPr dirty="0"/>
+              <a:t> gesture of love </a:t>
+            </a:r>
+            <a:r>
+              <a:rPr dirty="0" err="1"/>
+              <a:t>na</a:t>
+            </a:r>
+            <a:r>
+              <a:rPr dirty="0"/>
+              <a:t> </a:t>
+            </a:r>
+            <a:r>
+              <a:rPr dirty="0" err="1"/>
+              <a:t>narinig</a:t>
+            </a:r>
+            <a:r>
+              <a:rPr dirty="0"/>
+              <a:t>, </a:t>
+            </a:r>
+            <a:r>
+              <a:rPr dirty="0" err="1"/>
+              <a:t>nabalitaan</a:t>
+            </a:r>
+            <a:r>
+              <a:rPr dirty="0"/>
+              <a:t>, o </a:t>
+            </a:r>
+            <a:r>
+              <a:rPr dirty="0" err="1"/>
+              <a:t>naranasan</a:t>
+            </a:r>
+            <a:r>
+              <a:rPr dirty="0"/>
+              <a:t> </a:t>
+            </a:r>
+            <a:r>
+              <a:rPr dirty="0" err="1"/>
+              <a:t>mo</a:t>
+            </a:r>
+            <a:r>
+              <a:rPr dirty="0"/>
+              <a:t>?' </a:t>
+            </a:r>
+            <a:endParaRPr lang="en-US" dirty="0"/>
+          </a:p>
+          <a:p>
+            <a:r>
+              <a:rPr dirty="0"/>
+              <a:t>Ask, then sit with the silence. This surfaces their felt experience of love, which you redirect to God's greater love next.</a:t>
             </a:r>
           </a:p>
         </p:txBody>
@@ -2124,7 +3108,86 @@
           <a:lstStyle/>
           <a:p>
             <a:r>
-              <a:t>PUKAW ~1 min (target 8:00). PAYOFF: 'Kung grabe ang 30-taon ni Forrest - ang Dios? 1,500 taon. 40 writers. 66 books. Para ihatid sa'yo ang puso Niya.' Grabeng effort, pagtatapat, pagmamahal. Lands the Big Idea.</a:t>
+              <a:rPr dirty="0"/>
+              <a:t>PUKAW ~1 min (target 8:00). </a:t>
+            </a:r>
+            <a:endParaRPr lang="en-US" dirty="0"/>
+          </a:p>
+          <a:p>
+            <a:r>
+              <a:rPr dirty="0"/>
+              <a:t>PAYOFF: 'Kung </a:t>
+            </a:r>
+            <a:r>
+              <a:rPr dirty="0" err="1"/>
+              <a:t>grabe</a:t>
+            </a:r>
+            <a:r>
+              <a:rPr dirty="0"/>
+              <a:t> ang 30-taon </a:t>
+            </a:r>
+            <a:r>
+              <a:rPr dirty="0" err="1"/>
+              <a:t>ni</a:t>
+            </a:r>
+            <a:r>
+              <a:rPr dirty="0"/>
+              <a:t> Forrest - ang Dios? </a:t>
+            </a:r>
+            <a:endParaRPr lang="en-US" dirty="0"/>
+          </a:p>
+          <a:p>
+            <a:r>
+              <a:rPr dirty="0"/>
+              <a:t>1,500 </a:t>
+            </a:r>
+            <a:r>
+              <a:rPr dirty="0" err="1"/>
+              <a:t>taon</a:t>
+            </a:r>
+            <a:r>
+              <a:rPr dirty="0"/>
+              <a:t>. 40 writers. 66 books. Para </a:t>
+            </a:r>
+            <a:r>
+              <a:rPr dirty="0" err="1"/>
+              <a:t>ihatid</a:t>
+            </a:r>
+            <a:r>
+              <a:rPr dirty="0"/>
+              <a:t> </a:t>
+            </a:r>
+            <a:r>
+              <a:rPr dirty="0" err="1"/>
+              <a:t>sa'yo</a:t>
+            </a:r>
+            <a:r>
+              <a:rPr dirty="0"/>
+              <a:t> ang puso Niya.' </a:t>
+            </a:r>
+            <a:r>
+              <a:rPr dirty="0" err="1"/>
+              <a:t>Grabeng</a:t>
+            </a:r>
+            <a:r>
+              <a:rPr dirty="0"/>
+              <a:t> effort, </a:t>
+            </a:r>
+            <a:r>
+              <a:rPr dirty="0" err="1"/>
+              <a:t>pagtatapat</a:t>
+            </a:r>
+            <a:r>
+              <a:rPr dirty="0"/>
+              <a:t>, </a:t>
+            </a:r>
+            <a:r>
+              <a:rPr dirty="0" err="1"/>
+              <a:t>pagmamahal</a:t>
+            </a:r>
+            <a:r>
+              <a:rPr dirty="0"/>
+              <a:t>. Lands the Big Idea.</a:t>
             </a:r>
           </a:p>
         </p:txBody>
